--- a/curso_es/pptx/S44.pptx
+++ b/curso_es/pptx/S44.pptx
@@ -4110,7 +4110,7 @@
                 </a:solidFill>
                 <a:latin typeface="Nunito Sans"/>
               </a:rPr>
-              <a:t>Dylan cree que las bebidas energéticas le ayudan a estudiar. Busca: «beneficios de las bebidas energéticas para estudiar».</a:t>
+              <a:t>Un chico cree que las bebidas energéticas le ayudan a estudiar. Busca: «beneficios de las bebidas energéticas para estudiar».</a:t>
             </a:r>
           </a:p>
         </p:txBody>
@@ -4728,7 +4728,7 @@
                 </a:solidFill>
                 <a:latin typeface="Nunito Sans"/>
               </a:rPr>
-              <a:t>Iker cree que fumar es malo para la salud. Ve un vídeo, sin ninguna fuente, que dice lo contrario. No le hace caso.</a:t>
+              <a:t>Un chico cree que fumar es malo para la salud. Ve un vídeo, sin ninguna fuente, que dice lo contrario. No le hace caso.</a:t>
             </a:r>
           </a:p>
         </p:txBody>
